--- a/evaluation/corpus/phoenix_evaluation.pptx
+++ b/evaluation/corpus/phoenix_evaluation.pptx
@@ -6,7 +6,6 @@
   </p:sldMasterIdLst>
   <p:sldIdLst>
     <p:sldId id="256" r:id="rId7"/>
-    <p:sldId id="257" r:id="rId8"/>
   </p:sldIdLst>
   <p:sldSz cx="9144000" cy="6858000" type="screen4x3"/>
   <p:notesSz cx="6858000" cy="9144000"/>
@@ -3105,100 +3104,32 @@
           <a:lstStyle/>
           <a:p>
             <a:r>
-              <a:t>Phoenix AI Evaluation</a:t>
-            </a:r>
-          </a:p>
-        </p:txBody>
-      </p:sp>
-      <p:sp>
-        <p:nvSpPr>
-          <p:cNvPr id="3" name="Content Placeholder 2"/>
-          <p:cNvSpPr>
-            <a:spLocks noGrp="1"/>
-          </p:cNvSpPr>
-          <p:nvPr>
-            <p:ph idx="1"/>
-          </p:nvPr>
-        </p:nvSpPr>
-        <p:spPr/>
-        <p:txBody>
-          <a:bodyPr/>
-          <a:lstStyle/>
-          <a:p>
-            <a:r>
-              <a:t>Qdrant</a:t>
-            </a:r>
-          </a:p>
-          <a:p>
-            <a:r>
-              <a:t>qwen3:4b-instruct</a:t>
-            </a:r>
-          </a:p>
-          <a:p>
-            <a:r>
-              <a:t>Hybrid retrieval: Dense + BM25 + RRF</a:t>
-            </a:r>
-          </a:p>
-        </p:txBody>
-      </p:sp>
-    </p:spTree>
-  </p:cSld>
-  <p:clrMapOvr>
-    <a:masterClrMapping/>
-  </p:clrMapOvr>
-</p:sld>
-</file>
-
-<file path=ppt/slides/slide2.xml><?xml version="1.0" encoding="utf-8"?>
-<p:sld xmlns:a="http://schemas.openxmlformats.org/drawingml/2006/main" xmlns:p="http://schemas.openxmlformats.org/presentationml/2006/main" xmlns:r="http://schemas.openxmlformats.org/officeDocument/2006/relationships">
-  <p:cSld>
-    <p:spTree>
-      <p:nvGrpSpPr>
-        <p:cNvPr id="1" name=""/>
-        <p:cNvGrpSpPr/>
-        <p:nvPr/>
-      </p:nvGrpSpPr>
-      <p:grpSpPr/>
-      <p:sp>
-        <p:nvSpPr>
-          <p:cNvPr id="2" name="Title 1"/>
-          <p:cNvSpPr>
-            <a:spLocks noGrp="1"/>
-          </p:cNvSpPr>
-          <p:nvPr>
-            <p:ph type="title"/>
-          </p:nvPr>
-        </p:nvSpPr>
-        <p:spPr/>
-        <p:txBody>
-          <a:bodyPr/>
-          <a:lstStyle/>
-          <a:p>
-            <a:r>
-              <a:t>Safety</a:t>
-            </a:r>
-          </a:p>
-        </p:txBody>
-      </p:sp>
-      <p:sp>
-        <p:nvSpPr>
-          <p:cNvPr id="3" name="Content Placeholder 2"/>
-          <p:cNvSpPr>
-            <a:spLocks noGrp="1"/>
-          </p:cNvSpPr>
-          <p:nvPr>
-            <p:ph idx="1"/>
-          </p:nvPr>
-        </p:nvSpPr>
-        <p:spPr/>
-        <p:txBody>
-          <a:bodyPr/>
-          <a:lstStyle/>
-          <a:p>
-            <a:r>
-              <a:t>Read-only retrieval is safe.</a:t>
-            </a:r>
-          </a:p>
+              <a:t>Phoenix Evaluation</a:t>
+            </a:r>
+          </a:p>
+        </p:txBody>
+      </p:sp>
+      <p:sp>
+        <p:nvSpPr>
+          <p:cNvPr id="3" name="TextBox 2"/>
+          <p:cNvSpPr txBox="1"/>
+          <p:nvPr/>
+        </p:nvSpPr>
+        <p:spPr>
+          <a:xfrm>
+            <a:off x="800000" y="1500000"/>
+            <a:ext cx="8000000" cy="3000000"/>
+          </a:xfrm>
+          <a:prstGeom prst="rect">
+            <a:avLst/>
+          </a:prstGeom>
+          <a:noFill/>
+        </p:spPr>
+        <p:txBody>
+          <a:bodyPr wrap="none">
+            <a:spAutoFit/>
+          </a:bodyPr>
+          <a:lstStyle/>
           <a:p>
             <a:r>
               <a:t>External modifications require approval.</a:t>
